--- a/curriculum/M01/W02/L03/slides-2.pptx
+++ b/curriculum/M01/W02/L03/slides-2.pptx
@@ -9852,6 +9852,24 @@
               </a:rPr>
               <a:t>정자가 충분하고 기능할 것</a:t>
             </a:r>
+          </a:p>
+          <a:p>
+            <a:pPr>
+              <a:spcAft>
+                <a:spcPts val="900"/>
+              </a:spcAft>
+            </a:pPr>
+            <a:r>
+              <a:rPr sz="1400" b="1" i="0">
+                <a:solidFill>
+                  <a:srgbClr val="F2B705"/>
+                </a:solidFill>
+                <a:latin typeface="Malgun Gothic"/>
+                <a:ea typeface="Malgun Gothic"/>
+                <a:cs typeface="Malgun Gothic"/>
+              </a:rPr>
+              <a:t>•  </a:t>
+            </a:r>
             <a:r>
               <a:rPr sz="1400" b="0" i="0">
                 <a:solidFill>
@@ -9861,7 +9879,7 @@
                 <a:ea typeface="Malgun Gothic"/>
                 <a:cs typeface="Malgun Gothic"/>
               </a:rPr>
-              <a:t> 2. </a:t>
+              <a:t>2. </a:t>
             </a:r>
             <a:r>
               <a:rPr sz="1400" b="1" i="0">
@@ -9874,6 +9892,24 @@
               </a:rPr>
               <a:t>배란이 일어날 것</a:t>
             </a:r>
+          </a:p>
+          <a:p>
+            <a:pPr>
+              <a:spcAft>
+                <a:spcPts val="900"/>
+              </a:spcAft>
+            </a:pPr>
+            <a:r>
+              <a:rPr sz="1400" b="1" i="0">
+                <a:solidFill>
+                  <a:srgbClr val="F2B705"/>
+                </a:solidFill>
+                <a:latin typeface="Malgun Gothic"/>
+                <a:ea typeface="Malgun Gothic"/>
+                <a:cs typeface="Malgun Gothic"/>
+              </a:rPr>
+              <a:t>•  </a:t>
+            </a:r>
             <a:r>
               <a:rPr sz="1400" b="0" i="0">
                 <a:solidFill>
@@ -9883,7 +9919,7 @@
                 <a:ea typeface="Malgun Gothic"/>
                 <a:cs typeface="Malgun Gothic"/>
               </a:rPr>
-              <a:t> 3. </a:t>
+              <a:t>3. </a:t>
             </a:r>
             <a:r>
               <a:rPr sz="1400" b="1" i="0">
@@ -9896,6 +9932,24 @@
               </a:rPr>
               <a:t>난관이 열려 있어 수정이 가능할 것</a:t>
             </a:r>
+          </a:p>
+          <a:p>
+            <a:pPr>
+              <a:spcAft>
+                <a:spcPts val="900"/>
+              </a:spcAft>
+            </a:pPr>
+            <a:r>
+              <a:rPr sz="1400" b="1" i="0">
+                <a:solidFill>
+                  <a:srgbClr val="F2B705"/>
+                </a:solidFill>
+                <a:latin typeface="Malgun Gothic"/>
+                <a:ea typeface="Malgun Gothic"/>
+                <a:cs typeface="Malgun Gothic"/>
+              </a:rPr>
+              <a:t>•  </a:t>
+            </a:r>
             <a:r>
               <a:rPr sz="1400" b="0" i="0">
                 <a:solidFill>
@@ -9905,7 +9959,7 @@
                 <a:ea typeface="Malgun Gothic"/>
                 <a:cs typeface="Malgun Gothic"/>
               </a:rPr>
-              <a:t> 4. </a:t>
+              <a:t>4. </a:t>
             </a:r>
             <a:r>
               <a:rPr sz="1400" b="1" i="0">
@@ -19462,11 +19516,40 @@
                 <a:ea typeface="Malgun Gothic"/>
                 <a:cs typeface="Malgun Gothic"/>
               </a:rPr>
-              <a:t>: Follicle 벽을 분해하는 효소를 유도해 난자가 방출되게 한다. 2. </a:t>
-            </a:r>
+              <a:t>: Follicle 벽을 분해하는 효소를 유도해 난자가 방출되게 한다.</a:t>
+            </a:r>
+          </a:p>
+          <a:p>
+            <a:pPr>
+              <a:spcAft>
+                <a:spcPts val="900"/>
+              </a:spcAft>
+            </a:pPr>
             <a:r>
               <a:rPr sz="1400" b="1" i="0">
                 <a:solidFill>
+                  <a:srgbClr val="F2B705"/>
+                </a:solidFill>
+                <a:latin typeface="Malgun Gothic"/>
+                <a:ea typeface="Malgun Gothic"/>
+                <a:cs typeface="Malgun Gothic"/>
+              </a:rPr>
+              <a:t>•  </a:t>
+            </a:r>
+            <a:r>
+              <a:rPr sz="1400" b="0" i="0">
+                <a:solidFill>
+                  <a:srgbClr val="11202B"/>
+                </a:solidFill>
+                <a:latin typeface="Malgun Gothic"/>
+                <a:ea typeface="Malgun Gothic"/>
+                <a:cs typeface="Malgun Gothic"/>
+              </a:rPr>
+              <a:t>2. </a:t>
+            </a:r>
+            <a:r>
+              <a:rPr sz="1400" b="1" i="0">
+                <a:solidFill>
                   <a:srgbClr val="11202B"/>
                 </a:solidFill>
                 <a:latin typeface="Malgun Gothic"/>
@@ -19484,7 +19567,36 @@
                 <a:ea typeface="Malgun Gothic"/>
                 <a:cs typeface="Malgun Gothic"/>
               </a:rPr>
-              <a:t>: 태아기부터 멈춰 있던 분열을 재개시킨다. 3. </a:t>
+              <a:t>: 태아기부터 멈춰 있던 분열을 재개시킨다.</a:t>
+            </a:r>
+          </a:p>
+          <a:p>
+            <a:pPr>
+              <a:spcAft>
+                <a:spcPts val="900"/>
+              </a:spcAft>
+            </a:pPr>
+            <a:r>
+              <a:rPr sz="1400" b="1" i="0">
+                <a:solidFill>
+                  <a:srgbClr val="F2B705"/>
+                </a:solidFill>
+                <a:latin typeface="Malgun Gothic"/>
+                <a:ea typeface="Malgun Gothic"/>
+                <a:cs typeface="Malgun Gothic"/>
+              </a:rPr>
+              <a:t>•  </a:t>
+            </a:r>
+            <a:r>
+              <a:rPr sz="1400" b="0" i="0">
+                <a:solidFill>
+                  <a:srgbClr val="11202B"/>
+                </a:solidFill>
+                <a:latin typeface="Malgun Gothic"/>
+                <a:ea typeface="Malgun Gothic"/>
+                <a:cs typeface="Malgun Gothic"/>
+              </a:rPr>
+              <a:t>3. </a:t>
             </a:r>
             <a:r>
               <a:rPr sz="1400" b="1" i="0">
@@ -20953,11 +21065,40 @@
                 <a:ea typeface="Malgun Gothic"/>
                 <a:cs typeface="Malgun Gothic"/>
               </a:rPr>
-              <a:t>: 여성 생식관에 들어온 정자가 몇 시간에 걸쳐 변화를 겪어 수정 능력을 얻는다. 이 과정이 끝나야 다음 단계가 가능하다. 2. </a:t>
-            </a:r>
+              <a:t>: 여성 생식관에 들어온 정자가 몇 시간에 걸쳐 변화를 겪어 수정 능력을 얻는다. 이 과정이 끝나야 다음 단계가 가능하다.</a:t>
+            </a:r>
+          </a:p>
+          <a:p>
+            <a:pPr>
+              <a:spcAft>
+                <a:spcPts val="900"/>
+              </a:spcAft>
+            </a:pPr>
             <a:r>
               <a:rPr sz="1400" b="1" i="0">
                 <a:solidFill>
+                  <a:srgbClr val="F2B705"/>
+                </a:solidFill>
+                <a:latin typeface="Malgun Gothic"/>
+                <a:ea typeface="Malgun Gothic"/>
+                <a:cs typeface="Malgun Gothic"/>
+              </a:rPr>
+              <a:t>•  </a:t>
+            </a:r>
+            <a:r>
+              <a:rPr sz="1400" b="0" i="0">
+                <a:solidFill>
+                  <a:srgbClr val="11202B"/>
+                </a:solidFill>
+                <a:latin typeface="Malgun Gothic"/>
+                <a:ea typeface="Malgun Gothic"/>
+                <a:cs typeface="Malgun Gothic"/>
+              </a:rPr>
+              <a:t>2. </a:t>
+            </a:r>
+            <a:r>
+              <a:rPr sz="1400" b="1" i="0">
+                <a:solidFill>
                   <a:srgbClr val="11202B"/>
                 </a:solidFill>
                 <a:latin typeface="Malgun Gothic"/>
@@ -20997,11 +21138,40 @@
                 <a:ea typeface="Malgun Gothic"/>
                 <a:cs typeface="Malgun Gothic"/>
               </a:rPr>
-              <a:t>이 일어나 acrosome의 효소가 방출되어 층을 분해한다. 3. </a:t>
-            </a:r>
+              <a:t>이 일어나 acrosome의 효소가 방출되어 층을 분해한다.</a:t>
+            </a:r>
+          </a:p>
+          <a:p>
+            <a:pPr>
+              <a:spcAft>
+                <a:spcPts val="900"/>
+              </a:spcAft>
+            </a:pPr>
             <a:r>
               <a:rPr sz="1400" b="1" i="0">
                 <a:solidFill>
+                  <a:srgbClr val="F2B705"/>
+                </a:solidFill>
+                <a:latin typeface="Malgun Gothic"/>
+                <a:ea typeface="Malgun Gothic"/>
+                <a:cs typeface="Malgun Gothic"/>
+              </a:rPr>
+              <a:t>•  </a:t>
+            </a:r>
+            <a:r>
+              <a:rPr sz="1400" b="0" i="0">
+                <a:solidFill>
+                  <a:srgbClr val="11202B"/>
+                </a:solidFill>
+                <a:latin typeface="Malgun Gothic"/>
+                <a:ea typeface="Malgun Gothic"/>
+                <a:cs typeface="Malgun Gothic"/>
+              </a:rPr>
+              <a:t>3. </a:t>
+            </a:r>
+            <a:r>
+              <a:rPr sz="1400" b="1" i="0">
+                <a:solidFill>
                   <a:srgbClr val="11202B"/>
                 </a:solidFill>
                 <a:latin typeface="Malgun Gothic"/>
@@ -21019,11 +21189,40 @@
                 <a:ea typeface="Malgun Gothic"/>
                 <a:cs typeface="Malgun Gothic"/>
               </a:rPr>
-              <a:t>: 정자의 막과 난자의 막이 융합하고 정자의 핵이 난자 안으로 들어간다. 4. </a:t>
-            </a:r>
+              <a:t>: 정자의 막과 난자의 막이 융합하고 정자의 핵이 난자 안으로 들어간다.</a:t>
+            </a:r>
+          </a:p>
+          <a:p>
+            <a:pPr>
+              <a:spcAft>
+                <a:spcPts val="900"/>
+              </a:spcAft>
+            </a:pPr>
             <a:r>
               <a:rPr sz="1400" b="1" i="0">
                 <a:solidFill>
+                  <a:srgbClr val="F2B705"/>
+                </a:solidFill>
+                <a:latin typeface="Malgun Gothic"/>
+                <a:ea typeface="Malgun Gothic"/>
+                <a:cs typeface="Malgun Gothic"/>
+              </a:rPr>
+              <a:t>•  </a:t>
+            </a:r>
+            <a:r>
+              <a:rPr sz="1400" b="0" i="0">
+                <a:solidFill>
+                  <a:srgbClr val="11202B"/>
+                </a:solidFill>
+                <a:latin typeface="Malgun Gothic"/>
+                <a:ea typeface="Malgun Gothic"/>
+                <a:cs typeface="Malgun Gothic"/>
+              </a:rPr>
+              <a:t>4. </a:t>
+            </a:r>
+            <a:r>
+              <a:rPr sz="1400" b="1" i="0">
+                <a:solidFill>
                   <a:srgbClr val="11202B"/>
                 </a:solidFill>
                 <a:latin typeface="Malgun Gothic"/>
@@ -21041,11 +21240,40 @@
                 <a:ea typeface="Malgun Gothic"/>
                 <a:cs typeface="Malgun Gothic"/>
               </a:rPr>
-              <a:t>: 정자가 들어오면 난자 안의 Ca²⁺이 급증하고, 저장된 과립이 방출되어 zona pellucida를 단단하게 바꾼다. 두 번째 정자가 들어오지 못하게 하는 장치다. 다수정이 되면 3n이 되어 생존할 수 없다. 5. </a:t>
-            </a:r>
+              <a:t>: 정자가 들어오면 난자 안의 Ca²⁺이 급증하고, 저장된 과립이 방출되어 zona pellucida를 단단하게 바꾼다. 두 번째 정자가 들어오지 못하게 하는 장치다. 다수정이 되면 3n이 되어 생존할 수 없다.</a:t>
+            </a:r>
+          </a:p>
+          <a:p>
+            <a:pPr>
+              <a:spcAft>
+                <a:spcPts val="900"/>
+              </a:spcAft>
+            </a:pPr>
             <a:r>
               <a:rPr sz="1400" b="1" i="0">
                 <a:solidFill>
+                  <a:srgbClr val="F2B705"/>
+                </a:solidFill>
+                <a:latin typeface="Malgun Gothic"/>
+                <a:ea typeface="Malgun Gothic"/>
+                <a:cs typeface="Malgun Gothic"/>
+              </a:rPr>
+              <a:t>•  </a:t>
+            </a:r>
+            <a:r>
+              <a:rPr sz="1400" b="0" i="0">
+                <a:solidFill>
+                  <a:srgbClr val="11202B"/>
+                </a:solidFill>
+                <a:latin typeface="Malgun Gothic"/>
+                <a:ea typeface="Malgun Gothic"/>
+                <a:cs typeface="Malgun Gothic"/>
+              </a:rPr>
+              <a:t>5. </a:t>
+            </a:r>
+            <a:r>
+              <a:rPr sz="1400" b="1" i="0">
+                <a:solidFill>
                   <a:srgbClr val="11202B"/>
                 </a:solidFill>
                 <a:latin typeface="Malgun Gothic"/>
@@ -21063,7 +21291,36 @@
                 <a:ea typeface="Malgun Gothic"/>
                 <a:cs typeface="Malgun Gothic"/>
               </a:rPr>
-              <a:t>: Ca²⁺ 급증이 멈춰 있던 분열을 재개시키고, 두 번째 극체가 방출된다. 6. </a:t>
+              <a:t>: Ca²⁺ 급증이 멈춰 있던 분열을 재개시키고, 두 번째 극체가 방출된다.</a:t>
+            </a:r>
+          </a:p>
+          <a:p>
+            <a:pPr>
+              <a:spcAft>
+                <a:spcPts val="900"/>
+              </a:spcAft>
+            </a:pPr>
+            <a:r>
+              <a:rPr sz="1400" b="1" i="0">
+                <a:solidFill>
+                  <a:srgbClr val="F2B705"/>
+                </a:solidFill>
+                <a:latin typeface="Malgun Gothic"/>
+                <a:ea typeface="Malgun Gothic"/>
+                <a:cs typeface="Malgun Gothic"/>
+              </a:rPr>
+              <a:t>•  </a:t>
+            </a:r>
+            <a:r>
+              <a:rPr sz="1400" b="0" i="0">
+                <a:solidFill>
+                  <a:srgbClr val="11202B"/>
+                </a:solidFill>
+                <a:latin typeface="Malgun Gothic"/>
+                <a:ea typeface="Malgun Gothic"/>
+                <a:cs typeface="Malgun Gothic"/>
+              </a:rPr>
+              <a:t>6. </a:t>
             </a:r>
             <a:r>
               <a:rPr sz="1400" b="1" i="0">

--- a/curriculum/M01/W02/L03/slides-2.pptx
+++ b/curriculum/M01/W02/L03/slides-2.pptx
@@ -15509,7 +15509,7 @@
                 <a:ea typeface="Malgun Gothic"/>
                 <a:cs typeface="Malgun Gothic"/>
               </a:rPr>
-              <a:t>M01-W02-L02 내분비계 요약 — 시상하부–뇌하수체 축, 음성·양성 되먹임, steroid 호르몬의 성질</a:t>
+              <a:t>M01-W02-L02 내분비계 요약: 호르몬과 되먹임 — 시상하부–뇌하수체 축, 음성·양성 되먹임, steroid 호르몬의 성질</a:t>
             </a:r>
           </a:p>
           <a:p>
@@ -15567,7 +15567,7 @@
                 <a:ea typeface="Malgun Gothic"/>
                 <a:cs typeface="Malgun Gothic"/>
               </a:rPr>
-              <a:t>M01-W01-L01 순환계 요약 — 호르몬의 혈중 운반</a:t>
+              <a:t>M01-W01-L01 순환계 요약: 심장·혈관·혈류와 항상성 — 호르몬의 혈중 운반</a:t>
             </a:r>
           </a:p>
         </p:txBody>
